--- a/track2/session3/MCP_Deck2_Specification.pptx
+++ b/track2/session3/MCP_Deck2_Specification.pptx
@@ -1359,7 +1359,7 @@
         <p:spPr>
           <a:xfrm>
             <a:off x="685800" y="1143000"/>
-            <a:ext cx="5486040" cy="3085920"/>
+            <a:ext cx="5486400" cy="3086100"/>
           </a:xfrm>
           <a:prstGeom prst="rect">
             <a:avLst/>
@@ -10554,25 +10554,31 @@
           </a:bodyPr>
           <a:lstStyle/>
           <a:p>
-            <a:pPr defTabSz="914400">
-              <a:lnSpc>
-                <a:spcPct val="100000"/>
-              </a:lnSpc>
+            <a:pPr>
               <a:tabLst>
                 <a:tab pos="0" algn="l"/>
               </a:tabLst>
             </a:pPr>
             <a:r>
-              <a:rPr lang="en-US" sz="1500" b="0" strike="noStrike" spc="-1">
+              <a:rPr lang="en-US" sz="1500" spc="-1" dirty="0">
                 <a:solidFill>
                   <a:srgbClr val="3A3536"/>
                 </a:solidFill>
-                <a:latin typeface="Calibri"/>
+                <a:ea typeface="Calibri"/>
+                <a:hlinkClick r:id="rId3"/>
+              </a:rPr>
+              <a:t>https://github.com/modelcontextprotocol</a:t>
+            </a:r>
+            <a:r>
+              <a:rPr lang="en-US" sz="1500" spc="-1" dirty="0">
+                <a:solidFill>
+                  <a:srgbClr val="3A3536"/>
+                </a:solidFill>
                 <a:ea typeface="Calibri"/>
               </a:rPr>
-              <a:t>Unlike a tutorial, a spec uses precise requirement language. In a regulated environment, the difference between MUST and SHOULD is the difference between a control and a suggestion.</a:t>
+              <a:t> </a:t>
             </a:r>
-            <a:endParaRPr lang="en-US" sz="1500" b="0" strike="noStrike" spc="-1">
+            <a:endParaRPr lang="en-US" sz="1500" b="0" strike="noStrike" spc="-1" dirty="0">
               <a:solidFill>
                 <a:srgbClr val="000000"/>
               </a:solidFill>
@@ -10697,7 +10703,7 @@
           <p:nvPr/>
         </p:nvPicPr>
         <p:blipFill>
-          <a:blip r:embed="rId3"/>
+          <a:blip r:embed="rId4"/>
           <a:stretch/>
         </p:blipFill>
         <p:spPr>
@@ -10957,7 +10963,7 @@
           <p:nvPr/>
         </p:nvPicPr>
         <p:blipFill>
-          <a:blip r:embed="rId4"/>
+          <a:blip r:embed="rId5"/>
           <a:stretch/>
         </p:blipFill>
         <p:spPr>
@@ -11217,7 +11223,7 @@
           <p:nvPr/>
         </p:nvPicPr>
         <p:blipFill>
-          <a:blip r:embed="rId5"/>
+          <a:blip r:embed="rId6"/>
           <a:stretch/>
         </p:blipFill>
         <p:spPr>
@@ -11480,7 +11486,7 @@
           <p:nvPr/>
         </p:nvPicPr>
         <p:blipFill>
-          <a:blip r:embed="rId6"/>
+          <a:blip r:embed="rId7"/>
           <a:stretch/>
         </p:blipFill>
         <p:spPr>
